--- a/.pptx-build/updated-finalizer/candidate.pptx
+++ b/.pptx-build/updated-finalizer/candidate.pptx
@@ -2,20 +2,20 @@
 <file path=ppt/presentation.xml><?xml version="1.0" encoding="utf-8"?>
 <p:presentation xmlns:p="http://schemas.openxmlformats.org/presentationml/2006/main">
   <p:sldMasterIdLst>
-    <p:sldMasterId xmlns:r="http://schemas.openxmlformats.org/officeDocument/2006/relationships" id="2147483648" r:id="Rda8ac9ccdf724804"/>
+    <p:sldMasterId xmlns:r="http://schemas.openxmlformats.org/officeDocument/2006/relationships" id="2147483648" r:id="R5b9ff94f90b04df7"/>
   </p:sldMasterIdLst>
   <p:notesMasterIdLst>
-    <p:notesMasterId xmlns:r="http://schemas.openxmlformats.org/officeDocument/2006/relationships" r:id="Rd5a63809680b4673"/>
+    <p:notesMasterId xmlns:r="http://schemas.openxmlformats.org/officeDocument/2006/relationships" r:id="R874887dcc5b34723"/>
   </p:notesMasterIdLst>
   <p:sldIdLst>
-    <p:sldId xmlns:r="http://schemas.openxmlformats.org/officeDocument/2006/relationships" id="256" r:id="R49dbf6ff1ac2426d"/>
-    <p:sldId xmlns:r="http://schemas.openxmlformats.org/officeDocument/2006/relationships" id="257" r:id="R0bd694e2c98d4532"/>
-    <p:sldId xmlns:r="http://schemas.openxmlformats.org/officeDocument/2006/relationships" id="258" r:id="R946d93c14a8a42cb"/>
-    <p:sldId xmlns:r="http://schemas.openxmlformats.org/officeDocument/2006/relationships" id="259" r:id="R664560cb08164275"/>
-    <p:sldId xmlns:r="http://schemas.openxmlformats.org/officeDocument/2006/relationships" id="260" r:id="Rb7260cf2f7c74fee"/>
-    <p:sldId xmlns:r="http://schemas.openxmlformats.org/officeDocument/2006/relationships" id="261" r:id="Rae9955e6a590400a"/>
-    <p:sldId xmlns:r="http://schemas.openxmlformats.org/officeDocument/2006/relationships" id="262" r:id="R77f2db68fa704310"/>
-    <p:sldId xmlns:r="http://schemas.openxmlformats.org/officeDocument/2006/relationships" id="263" r:id="R9d5917c167104988"/>
+    <p:sldId xmlns:r="http://schemas.openxmlformats.org/officeDocument/2006/relationships" id="256" r:id="R8dcc0b07b3ab4ab1"/>
+    <p:sldId xmlns:r="http://schemas.openxmlformats.org/officeDocument/2006/relationships" id="257" r:id="R1705f3f812b2493d"/>
+    <p:sldId xmlns:r="http://schemas.openxmlformats.org/officeDocument/2006/relationships" id="258" r:id="R899b327408f84544"/>
+    <p:sldId xmlns:r="http://schemas.openxmlformats.org/officeDocument/2006/relationships" id="259" r:id="R517f03a67c204738"/>
+    <p:sldId xmlns:r="http://schemas.openxmlformats.org/officeDocument/2006/relationships" id="260" r:id="R6c36da7ad5824769"/>
+    <p:sldId xmlns:r="http://schemas.openxmlformats.org/officeDocument/2006/relationships" id="261" r:id="Rdd7e418c17a34b9d"/>
+    <p:sldId xmlns:r="http://schemas.openxmlformats.org/officeDocument/2006/relationships" id="262" r:id="R6c77432779844194"/>
+    <p:sldId xmlns:r="http://schemas.openxmlformats.org/officeDocument/2006/relationships" id="263" r:id="R075ac4ab3a3345c5"/>
   </p:sldIdLst>
   <p:sldSz cx="12192000" cy="6858000"/>
   <p:notesSz cx="6858000" cy="9144000"/>
@@ -1028,7 +1028,7 @@
           <p:cNvPr id="7" name="Rectangle 6">
             <a:extLst xmlns:a="http://schemas.openxmlformats.org/drawingml/2006/main">
               <a:ext uri="{FF2B5EF4-FFF2-40B4-BE49-F238E27FC236}">
-                <a16:creationId xmlns:a16="http://schemas.microsoft.com/office/drawing/2014/main" id="{9948D8B9-CEB3-4BFD-B91B-9928ECB65030}"/>
+                <a16:creationId xmlns:a16="http://schemas.microsoft.com/office/drawing/2014/main" id="{6D15ED6F-ADA6-4F5C-BEE3-C7AAA5649BFA}"/>
               </a:ext>
             </a:extLst>
           </p:cNvPr>
@@ -1074,7 +1074,7 @@
           <p:cNvPr id="8" name="Rectangle 7">
             <a:extLst xmlns:a="http://schemas.openxmlformats.org/drawingml/2006/main">
               <a:ext uri="{FF2B5EF4-FFF2-40B4-BE49-F238E27FC236}">
-                <a16:creationId xmlns:a16="http://schemas.microsoft.com/office/drawing/2014/main" id="{9B1861A8-2450-45AE-8AD9-B3A79EE2AB72}"/>
+                <a16:creationId xmlns:a16="http://schemas.microsoft.com/office/drawing/2014/main" id="{76C39DBA-59BE-4B16-8367-F8E341E77387}"/>
               </a:ext>
             </a:extLst>
           </p:cNvPr>
@@ -1122,7 +1122,7 @@
           <p:cNvPr id="2" name="Title 1">
             <a:extLst xmlns:a="http://schemas.openxmlformats.org/drawingml/2006/main">
               <a:ext uri="{FF2B5EF4-FFF2-40B4-BE49-F238E27FC236}">
-                <a16:creationId xmlns:a16="http://schemas.microsoft.com/office/drawing/2014/main" id="{9DBDC9C4-A214-42C5-B1FF-26243C3422A6}"/>
+                <a16:creationId xmlns:a16="http://schemas.microsoft.com/office/drawing/2014/main" id="{83378545-9C35-496F-A916-2993451E8653}"/>
               </a:ext>
             </a:extLst>
           </p:cNvPr>
@@ -1166,7 +1166,7 @@
           <p:cNvPr id="3" name="Subtitle 2">
             <a:extLst xmlns:a="http://schemas.openxmlformats.org/drawingml/2006/main">
               <a:ext uri="{FF2B5EF4-FFF2-40B4-BE49-F238E27FC236}">
-                <a16:creationId xmlns:a16="http://schemas.microsoft.com/office/drawing/2014/main" id="{AE1E73F6-5D12-400F-8D17-4C97C024952B}"/>
+                <a16:creationId xmlns:a16="http://schemas.microsoft.com/office/drawing/2014/main" id="{E7435F15-40CB-48BC-A0E4-27E88C1AC969}"/>
               </a:ext>
             </a:extLst>
           </p:cNvPr>
@@ -1245,7 +1245,7 @@
           <p:cNvPr id="4" name="Date Placeholder 3">
             <a:extLst xmlns:a="http://schemas.openxmlformats.org/drawingml/2006/main">
               <a:ext uri="{FF2B5EF4-FFF2-40B4-BE49-F238E27FC236}">
-                <a16:creationId xmlns:a16="http://schemas.microsoft.com/office/drawing/2014/main" id="{C95491C2-BFDF-4237-9FA1-FE9545F26A75}"/>
+                <a16:creationId xmlns:a16="http://schemas.microsoft.com/office/drawing/2014/main" id="{2EA94E12-D480-41D7-B568-A025A230D9C7}"/>
               </a:ext>
             </a:extLst>
           </p:cNvPr>
@@ -1273,7 +1273,7 @@
           <p:cNvPr id="5" name="Footer Placeholder 4">
             <a:extLst xmlns:a="http://schemas.openxmlformats.org/drawingml/2006/main">
               <a:ext uri="{FF2B5EF4-FFF2-40B4-BE49-F238E27FC236}">
-                <a16:creationId xmlns:a16="http://schemas.microsoft.com/office/drawing/2014/main" id="{5FC7B13A-D604-430F-BDAC-28CA09297293}"/>
+                <a16:creationId xmlns:a16="http://schemas.microsoft.com/office/drawing/2014/main" id="{4FAAD39D-1515-4E1A-A3FB-77FAFC0337E8}"/>
               </a:ext>
             </a:extLst>
           </p:cNvPr>
@@ -1298,7 +1298,7 @@
           <p:cNvPr id="6" name="Slide Number Placeholder 5">
             <a:extLst xmlns:a="http://schemas.openxmlformats.org/drawingml/2006/main">
               <a:ext uri="{FF2B5EF4-FFF2-40B4-BE49-F238E27FC236}">
-                <a16:creationId xmlns:a16="http://schemas.microsoft.com/office/drawing/2014/main" id="{0F5934D3-2EB4-4742-BAC9-7411C63E70E1}"/>
+                <a16:creationId xmlns:a16="http://schemas.microsoft.com/office/drawing/2014/main" id="{00728E3C-4BDE-495B-B889-B3D566F6C211}"/>
               </a:ext>
             </a:extLst>
           </p:cNvPr>
@@ -1343,7 +1343,7 @@
           <p:cNvPr id="2" name="Title 1">
             <a:extLst xmlns:a="http://schemas.openxmlformats.org/drawingml/2006/main">
               <a:ext uri="{FF2B5EF4-FFF2-40B4-BE49-F238E27FC236}">
-                <a16:creationId xmlns:a16="http://schemas.microsoft.com/office/drawing/2014/main" id="{9F961510-7853-4C84-A856-7934FA1565E1}"/>
+                <a16:creationId xmlns:a16="http://schemas.microsoft.com/office/drawing/2014/main" id="{ADA649C7-2129-4446-9915-2C69F8E66202}"/>
               </a:ext>
             </a:extLst>
           </p:cNvPr>
@@ -1371,7 +1371,7 @@
           <p:cNvPr id="3" name="Vertical Text Placeholder 2">
             <a:extLst xmlns:a="http://schemas.openxmlformats.org/drawingml/2006/main">
               <a:ext uri="{FF2B5EF4-FFF2-40B4-BE49-F238E27FC236}">
-                <a16:creationId xmlns:a16="http://schemas.microsoft.com/office/drawing/2014/main" id="{F4C92425-D816-4556-8BDC-42E1D22F6FB8}"/>
+                <a16:creationId xmlns:a16="http://schemas.microsoft.com/office/drawing/2014/main" id="{FC60700B-8615-4E40-98C5-F1CED12FBCC2}"/>
               </a:ext>
             </a:extLst>
           </p:cNvPr>
@@ -1434,7 +1434,7 @@
           <p:cNvPr id="7" name="Date Placeholder 6">
             <a:extLst xmlns:a="http://schemas.openxmlformats.org/drawingml/2006/main">
               <a:ext uri="{FF2B5EF4-FFF2-40B4-BE49-F238E27FC236}">
-                <a16:creationId xmlns:a16="http://schemas.microsoft.com/office/drawing/2014/main" id="{8D14D4C3-D49C-4012-B5C9-965D6F8382B4}"/>
+                <a16:creationId xmlns:a16="http://schemas.microsoft.com/office/drawing/2014/main" id="{5D5F03C4-3195-461C-8D82-4EA86FBFEEF5}"/>
               </a:ext>
             </a:extLst>
           </p:cNvPr>
@@ -1462,7 +1462,7 @@
           <p:cNvPr id="8" name="Footer Placeholder 7">
             <a:extLst xmlns:a="http://schemas.openxmlformats.org/drawingml/2006/main">
               <a:ext uri="{FF2B5EF4-FFF2-40B4-BE49-F238E27FC236}">
-                <a16:creationId xmlns:a16="http://schemas.microsoft.com/office/drawing/2014/main" id="{E6EA89E8-162F-4BEE-A63C-C5C9A9FD2DE5}"/>
+                <a16:creationId xmlns:a16="http://schemas.microsoft.com/office/drawing/2014/main" id="{D8FE4305-D9B7-44EE-B917-CBDAFE96C57D}"/>
               </a:ext>
             </a:extLst>
           </p:cNvPr>
@@ -1487,7 +1487,7 @@
           <p:cNvPr id="9" name="Slide Number Placeholder 8">
             <a:extLst xmlns:a="http://schemas.openxmlformats.org/drawingml/2006/main">
               <a:ext uri="{FF2B5EF4-FFF2-40B4-BE49-F238E27FC236}">
-                <a16:creationId xmlns:a16="http://schemas.microsoft.com/office/drawing/2014/main" id="{BD1929CE-57D4-4A4F-B600-B711CD2957A1}"/>
+                <a16:creationId xmlns:a16="http://schemas.microsoft.com/office/drawing/2014/main" id="{848DA4C7-DC53-4FB5-9D84-385BD6FA90A6}"/>
               </a:ext>
             </a:extLst>
           </p:cNvPr>
@@ -1532,7 +1532,7 @@
           <p:cNvPr id="2" name="Vertical Title 1">
             <a:extLst xmlns:a="http://schemas.openxmlformats.org/drawingml/2006/main">
               <a:ext uri="{FF2B5EF4-FFF2-40B4-BE49-F238E27FC236}">
-                <a16:creationId xmlns:a16="http://schemas.microsoft.com/office/drawing/2014/main" id="{9A3785CD-EE35-4526-AEB7-B792F76D89C7}"/>
+                <a16:creationId xmlns:a16="http://schemas.microsoft.com/office/drawing/2014/main" id="{B1C173FB-B1D5-4972-AF9C-26FB8F925337}"/>
               </a:ext>
             </a:extLst>
           </p:cNvPr>
@@ -1565,7 +1565,7 @@
           <p:cNvPr id="3" name="Vertical Text Placeholder 2">
             <a:extLst xmlns:a="http://schemas.openxmlformats.org/drawingml/2006/main">
               <a:ext uri="{FF2B5EF4-FFF2-40B4-BE49-F238E27FC236}">
-                <a16:creationId xmlns:a16="http://schemas.microsoft.com/office/drawing/2014/main" id="{298A9CC5-0861-4894-859A-D0EF26783D88}"/>
+                <a16:creationId xmlns:a16="http://schemas.microsoft.com/office/drawing/2014/main" id="{9BA61605-F5E0-4D5C-B294-484C394A0E08}"/>
               </a:ext>
             </a:extLst>
           </p:cNvPr>
@@ -1633,7 +1633,7 @@
           <p:cNvPr id="7" name="Date Placeholder 6">
             <a:extLst xmlns:a="http://schemas.openxmlformats.org/drawingml/2006/main">
               <a:ext uri="{FF2B5EF4-FFF2-40B4-BE49-F238E27FC236}">
-                <a16:creationId xmlns:a16="http://schemas.microsoft.com/office/drawing/2014/main" id="{DB89275C-2739-4CB5-A3F7-A33FBD9B22FA}"/>
+                <a16:creationId xmlns:a16="http://schemas.microsoft.com/office/drawing/2014/main" id="{C3AC7DB4-F994-4AA4-A0D2-2315058F5162}"/>
               </a:ext>
             </a:extLst>
           </p:cNvPr>
@@ -1661,7 +1661,7 @@
           <p:cNvPr id="8" name="Footer Placeholder 7">
             <a:extLst xmlns:a="http://schemas.openxmlformats.org/drawingml/2006/main">
               <a:ext uri="{FF2B5EF4-FFF2-40B4-BE49-F238E27FC236}">
-                <a16:creationId xmlns:a16="http://schemas.microsoft.com/office/drawing/2014/main" id="{12C0D508-8C24-4F18-A049-2531348AB3EE}"/>
+                <a16:creationId xmlns:a16="http://schemas.microsoft.com/office/drawing/2014/main" id="{5791663A-7DAA-4817-98BB-FA43BACBED57}"/>
               </a:ext>
             </a:extLst>
           </p:cNvPr>
@@ -1686,7 +1686,7 @@
           <p:cNvPr id="9" name="Slide Number Placeholder 8">
             <a:extLst xmlns:a="http://schemas.openxmlformats.org/drawingml/2006/main">
               <a:ext uri="{FF2B5EF4-FFF2-40B4-BE49-F238E27FC236}">
-                <a16:creationId xmlns:a16="http://schemas.microsoft.com/office/drawing/2014/main" id="{B7EB9EDF-278A-4C9C-A9EC-9C6E30CA5221}"/>
+                <a16:creationId xmlns:a16="http://schemas.microsoft.com/office/drawing/2014/main" id="{AC4BF424-28A2-4F61-B49C-6A439E09007B}"/>
               </a:ext>
             </a:extLst>
           </p:cNvPr>
@@ -1731,7 +1731,7 @@
           <p:cNvPr id="2" name="Title 1">
             <a:extLst xmlns:a="http://schemas.openxmlformats.org/drawingml/2006/main">
               <a:ext uri="{FF2B5EF4-FFF2-40B4-BE49-F238E27FC236}">
-                <a16:creationId xmlns:a16="http://schemas.microsoft.com/office/drawing/2014/main" id="{7406F7DE-439D-4B87-90BF-34F2684888F1}"/>
+                <a16:creationId xmlns:a16="http://schemas.microsoft.com/office/drawing/2014/main" id="{1DC34C77-4C15-4833-910E-F711A8921D6D}"/>
               </a:ext>
             </a:extLst>
           </p:cNvPr>
@@ -1759,7 +1759,7 @@
           <p:cNvPr id="3" name="Content Placeholder 2">
             <a:extLst xmlns:a="http://schemas.openxmlformats.org/drawingml/2006/main">
               <a:ext uri="{FF2B5EF4-FFF2-40B4-BE49-F238E27FC236}">
-                <a16:creationId xmlns:a16="http://schemas.microsoft.com/office/drawing/2014/main" id="{14104125-0808-41E2-9B17-852BC1AAF79A}"/>
+                <a16:creationId xmlns:a16="http://schemas.microsoft.com/office/drawing/2014/main" id="{4B9B309C-C2FE-4747-A755-A38C1ADB2F79}"/>
               </a:ext>
             </a:extLst>
           </p:cNvPr>
@@ -1822,7 +1822,7 @@
           <p:cNvPr id="4" name="Date Placeholder 3">
             <a:extLst xmlns:a="http://schemas.openxmlformats.org/drawingml/2006/main">
               <a:ext uri="{FF2B5EF4-FFF2-40B4-BE49-F238E27FC236}">
-                <a16:creationId xmlns:a16="http://schemas.microsoft.com/office/drawing/2014/main" id="{634BCB95-2F5C-414F-A0B5-1988DA9A24E5}"/>
+                <a16:creationId xmlns:a16="http://schemas.microsoft.com/office/drawing/2014/main" id="{B5476900-34C6-42AA-B5A1-264670614AFC}"/>
               </a:ext>
             </a:extLst>
           </p:cNvPr>
@@ -1850,7 +1850,7 @@
           <p:cNvPr id="5" name="Footer Placeholder 4">
             <a:extLst xmlns:a="http://schemas.openxmlformats.org/drawingml/2006/main">
               <a:ext uri="{FF2B5EF4-FFF2-40B4-BE49-F238E27FC236}">
-                <a16:creationId xmlns:a16="http://schemas.microsoft.com/office/drawing/2014/main" id="{5D09917E-DD67-4768-BC8D-82CE69DFCCD3}"/>
+                <a16:creationId xmlns:a16="http://schemas.microsoft.com/office/drawing/2014/main" id="{1C6DC3CC-2FB5-4A59-98F5-1354BA7ED259}"/>
               </a:ext>
             </a:extLst>
           </p:cNvPr>
@@ -1875,7 +1875,7 @@
           <p:cNvPr id="6" name="Slide Number Placeholder 5">
             <a:extLst xmlns:a="http://schemas.openxmlformats.org/drawingml/2006/main">
               <a:ext uri="{FF2B5EF4-FFF2-40B4-BE49-F238E27FC236}">
-                <a16:creationId xmlns:a16="http://schemas.microsoft.com/office/drawing/2014/main" id="{ADBA2BC3-8274-4D00-8949-D2FABCDDB725}"/>
+                <a16:creationId xmlns:a16="http://schemas.microsoft.com/office/drawing/2014/main" id="{8C1AC29E-B564-4980-8142-28BE82AD6481}"/>
               </a:ext>
             </a:extLst>
           </p:cNvPr>
@@ -1920,7 +1920,7 @@
           <p:cNvPr id="2" name="Title 1">
             <a:extLst xmlns:a="http://schemas.openxmlformats.org/drawingml/2006/main">
               <a:ext uri="{FF2B5EF4-FFF2-40B4-BE49-F238E27FC236}">
-                <a16:creationId xmlns:a16="http://schemas.microsoft.com/office/drawing/2014/main" id="{E86FDDB8-D931-4E38-BF24-1356D362357C}"/>
+                <a16:creationId xmlns:a16="http://schemas.microsoft.com/office/drawing/2014/main" id="{1920427E-A999-456E-A7A5-5E2B69197374}"/>
               </a:ext>
             </a:extLst>
           </p:cNvPr>
@@ -1967,7 +1967,7 @@
           <p:cNvPr id="3" name="Text Placeholder 2">
             <a:extLst xmlns:a="http://schemas.openxmlformats.org/drawingml/2006/main">
               <a:ext uri="{FF2B5EF4-FFF2-40B4-BE49-F238E27FC236}">
-                <a16:creationId xmlns:a16="http://schemas.microsoft.com/office/drawing/2014/main" id="{41A9F256-7B17-49EC-A7E5-C77E2755B185}"/>
+                <a16:creationId xmlns:a16="http://schemas.microsoft.com/office/drawing/2014/main" id="{0A3ADCAE-9F61-4603-B205-ACB887352734}"/>
               </a:ext>
             </a:extLst>
           </p:cNvPr>
@@ -2096,7 +2096,7 @@
           <p:cNvPr id="4" name="Date Placeholder 3">
             <a:extLst xmlns:a="http://schemas.openxmlformats.org/drawingml/2006/main">
               <a:ext uri="{FF2B5EF4-FFF2-40B4-BE49-F238E27FC236}">
-                <a16:creationId xmlns:a16="http://schemas.microsoft.com/office/drawing/2014/main" id="{4E44281D-437A-4930-B6F3-5D5032D4E21B}"/>
+                <a16:creationId xmlns:a16="http://schemas.microsoft.com/office/drawing/2014/main" id="{D8D6B008-A716-4978-8AF7-562E926BBF52}"/>
               </a:ext>
             </a:extLst>
           </p:cNvPr>
@@ -2124,7 +2124,7 @@
           <p:cNvPr id="5" name="Footer Placeholder 4">
             <a:extLst xmlns:a="http://schemas.openxmlformats.org/drawingml/2006/main">
               <a:ext uri="{FF2B5EF4-FFF2-40B4-BE49-F238E27FC236}">
-                <a16:creationId xmlns:a16="http://schemas.microsoft.com/office/drawing/2014/main" id="{842EC4D4-2938-4114-8A11-58F9EB99E351}"/>
+                <a16:creationId xmlns:a16="http://schemas.microsoft.com/office/drawing/2014/main" id="{D748025B-3ACE-415D-A7A5-105AFF226ED9}"/>
               </a:ext>
             </a:extLst>
           </p:cNvPr>
@@ -2149,7 +2149,7 @@
           <p:cNvPr id="6" name="Slide Number Placeholder 5">
             <a:extLst xmlns:a="http://schemas.openxmlformats.org/drawingml/2006/main">
               <a:ext uri="{FF2B5EF4-FFF2-40B4-BE49-F238E27FC236}">
-                <a16:creationId xmlns:a16="http://schemas.microsoft.com/office/drawing/2014/main" id="{5BEF0693-17F6-4B79-A13D-DBD1507B3004}"/>
+                <a16:creationId xmlns:a16="http://schemas.microsoft.com/office/drawing/2014/main" id="{D3B806AF-E32A-45DD-9349-BEA8DB53DF86}"/>
               </a:ext>
             </a:extLst>
           </p:cNvPr>
@@ -2194,7 +2194,7 @@
           <p:cNvPr id="2" name="Title 1">
             <a:extLst xmlns:a="http://schemas.openxmlformats.org/drawingml/2006/main">
               <a:ext uri="{FF2B5EF4-FFF2-40B4-BE49-F238E27FC236}">
-                <a16:creationId xmlns:a16="http://schemas.microsoft.com/office/drawing/2014/main" id="{AADA0FDE-0D0C-49C9-8D4F-B20DDEB2A1A8}"/>
+                <a16:creationId xmlns:a16="http://schemas.microsoft.com/office/drawing/2014/main" id="{9848FE83-7872-4E55-96FE-7E9E7ACC9967}"/>
               </a:ext>
             </a:extLst>
           </p:cNvPr>
@@ -2222,7 +2222,7 @@
           <p:cNvPr id="3" name="Content Placeholder 2">
             <a:extLst xmlns:a="http://schemas.openxmlformats.org/drawingml/2006/main">
               <a:ext uri="{FF2B5EF4-FFF2-40B4-BE49-F238E27FC236}">
-                <a16:creationId xmlns:a16="http://schemas.microsoft.com/office/drawing/2014/main" id="{66DA344B-1158-46D2-8BC7-1BBCC6A528D7}"/>
+                <a16:creationId xmlns:a16="http://schemas.microsoft.com/office/drawing/2014/main" id="{483024EF-1EFB-4F0A-91F8-6DFCFE437203}"/>
               </a:ext>
             </a:extLst>
           </p:cNvPr>
@@ -2327,7 +2327,7 @@
           <p:cNvPr id="4" name="Content Placeholder 3">
             <a:extLst xmlns:a="http://schemas.openxmlformats.org/drawingml/2006/main">
               <a:ext uri="{FF2B5EF4-FFF2-40B4-BE49-F238E27FC236}">
-                <a16:creationId xmlns:a16="http://schemas.microsoft.com/office/drawing/2014/main" id="{24A1A6D3-BF38-49F9-91BE-5DE33DF82845}"/>
+                <a16:creationId xmlns:a16="http://schemas.microsoft.com/office/drawing/2014/main" id="{9D4C70B7-04B1-4E1E-90ED-0A7C28F7B33C}"/>
               </a:ext>
             </a:extLst>
           </p:cNvPr>
@@ -2432,7 +2432,7 @@
           <p:cNvPr id="8" name="Date Placeholder 7">
             <a:extLst xmlns:a="http://schemas.openxmlformats.org/drawingml/2006/main">
               <a:ext uri="{FF2B5EF4-FFF2-40B4-BE49-F238E27FC236}">
-                <a16:creationId xmlns:a16="http://schemas.microsoft.com/office/drawing/2014/main" id="{985B0291-1AE2-4148-8818-AB30268E14CA}"/>
+                <a16:creationId xmlns:a16="http://schemas.microsoft.com/office/drawing/2014/main" id="{512F28B7-9E98-42BA-9FF4-1DA78D141F98}"/>
               </a:ext>
             </a:extLst>
           </p:cNvPr>
@@ -2460,7 +2460,7 @@
           <p:cNvPr id="9" name="Footer Placeholder 8">
             <a:extLst xmlns:a="http://schemas.openxmlformats.org/drawingml/2006/main">
               <a:ext uri="{FF2B5EF4-FFF2-40B4-BE49-F238E27FC236}">
-                <a16:creationId xmlns:a16="http://schemas.microsoft.com/office/drawing/2014/main" id="{6D761CBF-4DCD-42C4-B1CC-C82D056DE19A}"/>
+                <a16:creationId xmlns:a16="http://schemas.microsoft.com/office/drawing/2014/main" id="{0505BECE-5A05-43DE-85D7-1ED7EABF7727}"/>
               </a:ext>
             </a:extLst>
           </p:cNvPr>
@@ -2485,7 +2485,7 @@
           <p:cNvPr id="10" name="Slide Number Placeholder 9">
             <a:extLst xmlns:a="http://schemas.openxmlformats.org/drawingml/2006/main">
               <a:ext uri="{FF2B5EF4-FFF2-40B4-BE49-F238E27FC236}">
-                <a16:creationId xmlns:a16="http://schemas.microsoft.com/office/drawing/2014/main" id="{1F974741-5E97-4098-BFCF-1CFE724FD1A9}"/>
+                <a16:creationId xmlns:a16="http://schemas.microsoft.com/office/drawing/2014/main" id="{CEC32A28-0E06-4975-BF5A-E6B7C37A31F4}"/>
               </a:ext>
             </a:extLst>
           </p:cNvPr>
@@ -2530,7 +2530,7 @@
           <p:cNvPr id="10" name="Title 9">
             <a:extLst xmlns:a="http://schemas.openxmlformats.org/drawingml/2006/main">
               <a:ext uri="{FF2B5EF4-FFF2-40B4-BE49-F238E27FC236}">
-                <a16:creationId xmlns:a16="http://schemas.microsoft.com/office/drawing/2014/main" id="{D2748C0D-5594-464E-954A-D78E4527CFA9}"/>
+                <a16:creationId xmlns:a16="http://schemas.microsoft.com/office/drawing/2014/main" id="{7FA90F7F-4A98-45EC-BE4A-019B45A4C55B}"/>
               </a:ext>
             </a:extLst>
           </p:cNvPr>
@@ -2558,7 +2558,7 @@
           <p:cNvPr id="3" name="Text Placeholder 2">
             <a:extLst xmlns:a="http://schemas.openxmlformats.org/drawingml/2006/main">
               <a:ext uri="{FF2B5EF4-FFF2-40B4-BE49-F238E27FC236}">
-                <a16:creationId xmlns:a16="http://schemas.microsoft.com/office/drawing/2014/main" id="{756AB81C-FC9F-434D-A3AC-DE8470F3482B}"/>
+                <a16:creationId xmlns:a16="http://schemas.microsoft.com/office/drawing/2014/main" id="{9D3F4577-6989-445D-99E0-0FFC629F251E}"/>
               </a:ext>
             </a:extLst>
           </p:cNvPr>
@@ -2642,7 +2642,7 @@
           <p:cNvPr id="4" name="Content Placeholder 3">
             <a:extLst xmlns:a="http://schemas.openxmlformats.org/drawingml/2006/main">
               <a:ext uri="{FF2B5EF4-FFF2-40B4-BE49-F238E27FC236}">
-                <a16:creationId xmlns:a16="http://schemas.microsoft.com/office/drawing/2014/main" id="{8F39E4B2-1226-47F0-9987-7A247E8E7300}"/>
+                <a16:creationId xmlns:a16="http://schemas.microsoft.com/office/drawing/2014/main" id="{9D4E47F9-622A-4FEA-A7A8-A48C5A6F0B4B}"/>
               </a:ext>
             </a:extLst>
           </p:cNvPr>
@@ -2747,7 +2747,7 @@
           <p:cNvPr id="5" name="Text Placeholder 4">
             <a:extLst xmlns:a="http://schemas.openxmlformats.org/drawingml/2006/main">
               <a:ext uri="{FF2B5EF4-FFF2-40B4-BE49-F238E27FC236}">
-                <a16:creationId xmlns:a16="http://schemas.microsoft.com/office/drawing/2014/main" id="{0BAA4BBD-FFB2-44EF-95C7-90AE3D1C175C}"/>
+                <a16:creationId xmlns:a16="http://schemas.microsoft.com/office/drawing/2014/main" id="{2479D23B-98C5-4E66-B9E4-BC9657290506}"/>
               </a:ext>
             </a:extLst>
           </p:cNvPr>
@@ -2831,7 +2831,7 @@
           <p:cNvPr id="6" name="Content Placeholder 5">
             <a:extLst xmlns:a="http://schemas.openxmlformats.org/drawingml/2006/main">
               <a:ext uri="{FF2B5EF4-FFF2-40B4-BE49-F238E27FC236}">
-                <a16:creationId xmlns:a16="http://schemas.microsoft.com/office/drawing/2014/main" id="{F2D1CB8C-EC7B-400E-B264-0BF0629EFD1F}"/>
+                <a16:creationId xmlns:a16="http://schemas.microsoft.com/office/drawing/2014/main" id="{2CC6CFF6-FAA8-4A1D-A909-BBB6CC18A5A1}"/>
               </a:ext>
             </a:extLst>
           </p:cNvPr>
@@ -2936,7 +2936,7 @@
           <p:cNvPr id="2" name="Date Placeholder 1">
             <a:extLst xmlns:a="http://schemas.openxmlformats.org/drawingml/2006/main">
               <a:ext uri="{FF2B5EF4-FFF2-40B4-BE49-F238E27FC236}">
-                <a16:creationId xmlns:a16="http://schemas.microsoft.com/office/drawing/2014/main" id="{98E7FC37-6372-4A37-825E-7CFA34A04F09}"/>
+                <a16:creationId xmlns:a16="http://schemas.microsoft.com/office/drawing/2014/main" id="{B128010B-5F45-40FE-8773-B31FAF52D701}"/>
               </a:ext>
             </a:extLst>
           </p:cNvPr>
@@ -2964,7 +2964,7 @@
           <p:cNvPr id="11" name="Footer Placeholder 10">
             <a:extLst xmlns:a="http://schemas.openxmlformats.org/drawingml/2006/main">
               <a:ext uri="{FF2B5EF4-FFF2-40B4-BE49-F238E27FC236}">
-                <a16:creationId xmlns:a16="http://schemas.microsoft.com/office/drawing/2014/main" id="{69DE838A-5545-4B4A-B711-F3F095909B4D}"/>
+                <a16:creationId xmlns:a16="http://schemas.microsoft.com/office/drawing/2014/main" id="{44B4A75E-1721-4A2B-9E10-8ADF22977067}"/>
               </a:ext>
             </a:extLst>
           </p:cNvPr>
@@ -2989,7 +2989,7 @@
           <p:cNvPr id="12" name="Slide Number Placeholder 11">
             <a:extLst xmlns:a="http://schemas.openxmlformats.org/drawingml/2006/main">
               <a:ext uri="{FF2B5EF4-FFF2-40B4-BE49-F238E27FC236}">
-                <a16:creationId xmlns:a16="http://schemas.microsoft.com/office/drawing/2014/main" id="{606DFFBD-80DE-4152-A1AE-0179DC162FB2}"/>
+                <a16:creationId xmlns:a16="http://schemas.microsoft.com/office/drawing/2014/main" id="{7C2B8A2E-0177-4F70-8431-6F20872865B6}"/>
               </a:ext>
             </a:extLst>
           </p:cNvPr>
@@ -3034,7 +3034,7 @@
           <p:cNvPr id="6" name="Title 5">
             <a:extLst xmlns:a="http://schemas.openxmlformats.org/drawingml/2006/main">
               <a:ext uri="{FF2B5EF4-FFF2-40B4-BE49-F238E27FC236}">
-                <a16:creationId xmlns:a16="http://schemas.microsoft.com/office/drawing/2014/main" id="{CDD3C915-414C-409B-A0FF-85CB10841ED5}"/>
+                <a16:creationId xmlns:a16="http://schemas.microsoft.com/office/drawing/2014/main" id="{BEC4AD6D-B7CE-4A21-B49C-14A60B680801}"/>
               </a:ext>
             </a:extLst>
           </p:cNvPr>
@@ -3062,7 +3062,7 @@
           <p:cNvPr id="2" name="Date Placeholder 1">
             <a:extLst xmlns:a="http://schemas.openxmlformats.org/drawingml/2006/main">
               <a:ext uri="{FF2B5EF4-FFF2-40B4-BE49-F238E27FC236}">
-                <a16:creationId xmlns:a16="http://schemas.microsoft.com/office/drawing/2014/main" id="{A3C7A1B5-C3E1-4287-9893-1A5C5F5E2AB4}"/>
+                <a16:creationId xmlns:a16="http://schemas.microsoft.com/office/drawing/2014/main" id="{76008F8E-D2E8-43D6-8E09-C0AD3EAA4A00}"/>
               </a:ext>
             </a:extLst>
           </p:cNvPr>
@@ -3090,7 +3090,7 @@
           <p:cNvPr id="7" name="Footer Placeholder 6">
             <a:extLst xmlns:a="http://schemas.openxmlformats.org/drawingml/2006/main">
               <a:ext uri="{FF2B5EF4-FFF2-40B4-BE49-F238E27FC236}">
-                <a16:creationId xmlns:a16="http://schemas.microsoft.com/office/drawing/2014/main" id="{FC6F8DDE-3B48-462F-9796-1F7B841754A3}"/>
+                <a16:creationId xmlns:a16="http://schemas.microsoft.com/office/drawing/2014/main" id="{1F4DF6D3-68AE-41C8-B8F4-7EC116CA9435}"/>
               </a:ext>
             </a:extLst>
           </p:cNvPr>
@@ -3115,7 +3115,7 @@
           <p:cNvPr id="8" name="Slide Number Placeholder 7">
             <a:extLst xmlns:a="http://schemas.openxmlformats.org/drawingml/2006/main">
               <a:ext uri="{FF2B5EF4-FFF2-40B4-BE49-F238E27FC236}">
-                <a16:creationId xmlns:a16="http://schemas.microsoft.com/office/drawing/2014/main" id="{4439DAEC-6863-409F-B641-D332A567898A}"/>
+                <a16:creationId xmlns:a16="http://schemas.microsoft.com/office/drawing/2014/main" id="{BF593891-746F-4E53-AD76-2D2CDB13141C}"/>
               </a:ext>
             </a:extLst>
           </p:cNvPr>
@@ -3160,7 +3160,7 @@
           <p:cNvPr id="5" name="Date Placeholder 4">
             <a:extLst xmlns:a="http://schemas.openxmlformats.org/drawingml/2006/main">
               <a:ext uri="{FF2B5EF4-FFF2-40B4-BE49-F238E27FC236}">
-                <a16:creationId xmlns:a16="http://schemas.microsoft.com/office/drawing/2014/main" id="{F76C78D8-B371-47F7-8265-89B9B8B3DC03}"/>
+                <a16:creationId xmlns:a16="http://schemas.microsoft.com/office/drawing/2014/main" id="{8D829218-F082-424B-AF34-4483A0CC7320}"/>
               </a:ext>
             </a:extLst>
           </p:cNvPr>
@@ -3188,7 +3188,7 @@
           <p:cNvPr id="6" name="Footer Placeholder 5">
             <a:extLst xmlns:a="http://schemas.openxmlformats.org/drawingml/2006/main">
               <a:ext uri="{FF2B5EF4-FFF2-40B4-BE49-F238E27FC236}">
-                <a16:creationId xmlns:a16="http://schemas.microsoft.com/office/drawing/2014/main" id="{0F0F1CFA-50FF-4FE1-B425-63A50EF4CC35}"/>
+                <a16:creationId xmlns:a16="http://schemas.microsoft.com/office/drawing/2014/main" id="{D4439D49-5A96-446E-B4E7-5E27D91D691C}"/>
               </a:ext>
             </a:extLst>
           </p:cNvPr>
@@ -3213,7 +3213,7 @@
           <p:cNvPr id="7" name="Slide Number Placeholder 6">
             <a:extLst xmlns:a="http://schemas.openxmlformats.org/drawingml/2006/main">
               <a:ext uri="{FF2B5EF4-FFF2-40B4-BE49-F238E27FC236}">
-                <a16:creationId xmlns:a16="http://schemas.microsoft.com/office/drawing/2014/main" id="{6513522F-7454-4BF2-9C4D-BEA0E4FC9873}"/>
+                <a16:creationId xmlns:a16="http://schemas.microsoft.com/office/drawing/2014/main" id="{D74185B5-D10D-463F-8FCA-60137F43CA02}"/>
               </a:ext>
             </a:extLst>
           </p:cNvPr>
@@ -3258,7 +3258,7 @@
           <p:cNvPr id="2" name="Title 1">
             <a:extLst xmlns:a="http://schemas.openxmlformats.org/drawingml/2006/main">
               <a:ext uri="{FF2B5EF4-FFF2-40B4-BE49-F238E27FC236}">
-                <a16:creationId xmlns:a16="http://schemas.microsoft.com/office/drawing/2014/main" id="{A527400D-E073-44F9-8EB0-67D8C235D55F}"/>
+                <a16:creationId xmlns:a16="http://schemas.microsoft.com/office/drawing/2014/main" id="{01D966FF-5CA4-4F1D-B9E2-408641295B85}"/>
               </a:ext>
             </a:extLst>
           </p:cNvPr>
@@ -3298,7 +3298,7 @@
           <p:cNvPr id="3" name="Content Placeholder 2">
             <a:extLst xmlns:a="http://schemas.openxmlformats.org/drawingml/2006/main">
               <a:ext uri="{FF2B5EF4-FFF2-40B4-BE49-F238E27FC236}">
-                <a16:creationId xmlns:a16="http://schemas.microsoft.com/office/drawing/2014/main" id="{ADA7E397-A480-48F7-A589-88FA73DBE2EB}"/>
+                <a16:creationId xmlns:a16="http://schemas.microsoft.com/office/drawing/2014/main" id="{A3853FFC-1C14-4EE9-9682-A8BA2A01F25A}"/>
               </a:ext>
             </a:extLst>
           </p:cNvPr>
@@ -3403,7 +3403,7 @@
           <p:cNvPr id="4" name="Text Placeholder 3">
             <a:extLst xmlns:a="http://schemas.openxmlformats.org/drawingml/2006/main">
               <a:ext uri="{FF2B5EF4-FFF2-40B4-BE49-F238E27FC236}">
-                <a16:creationId xmlns:a16="http://schemas.microsoft.com/office/drawing/2014/main" id="{FEA93A3B-5BDE-4941-9D9D-818BA5786368}"/>
+                <a16:creationId xmlns:a16="http://schemas.microsoft.com/office/drawing/2014/main" id="{E5A6FCA2-4F94-40EC-83D0-CACDCD4762E5}"/>
               </a:ext>
             </a:extLst>
           </p:cNvPr>
@@ -3484,7 +3484,7 @@
           <p:cNvPr id="8" name="Date Placeholder 7">
             <a:extLst xmlns:a="http://schemas.openxmlformats.org/drawingml/2006/main">
               <a:ext uri="{FF2B5EF4-FFF2-40B4-BE49-F238E27FC236}">
-                <a16:creationId xmlns:a16="http://schemas.microsoft.com/office/drawing/2014/main" id="{78A40372-81B4-44E1-8617-E94E181AF04F}"/>
+                <a16:creationId xmlns:a16="http://schemas.microsoft.com/office/drawing/2014/main" id="{577E46B5-7D4D-42CA-9EEE-F16CB218536E}"/>
               </a:ext>
             </a:extLst>
           </p:cNvPr>
@@ -3512,7 +3512,7 @@
           <p:cNvPr id="9" name="Footer Placeholder 8">
             <a:extLst xmlns:a="http://schemas.openxmlformats.org/drawingml/2006/main">
               <a:ext uri="{FF2B5EF4-FFF2-40B4-BE49-F238E27FC236}">
-                <a16:creationId xmlns:a16="http://schemas.microsoft.com/office/drawing/2014/main" id="{491A9B17-E950-4F34-9FF1-FB07FA2667D8}"/>
+                <a16:creationId xmlns:a16="http://schemas.microsoft.com/office/drawing/2014/main" id="{582AEB28-16D9-421C-942C-B4FE3B785079}"/>
               </a:ext>
             </a:extLst>
           </p:cNvPr>
@@ -3537,7 +3537,7 @@
           <p:cNvPr id="10" name="Slide Number Placeholder 9">
             <a:extLst xmlns:a="http://schemas.openxmlformats.org/drawingml/2006/main">
               <a:ext uri="{FF2B5EF4-FFF2-40B4-BE49-F238E27FC236}">
-                <a16:creationId xmlns:a16="http://schemas.microsoft.com/office/drawing/2014/main" id="{868193C1-299F-4148-BA3E-F1B618E8D006}"/>
+                <a16:creationId xmlns:a16="http://schemas.microsoft.com/office/drawing/2014/main" id="{B5515E53-824A-41D7-AFB7-C24F4E9E2A00}"/>
               </a:ext>
             </a:extLst>
           </p:cNvPr>
@@ -3582,7 +3582,7 @@
           <p:cNvPr id="2" name="Title 1">
             <a:extLst xmlns:a="http://schemas.openxmlformats.org/drawingml/2006/main">
               <a:ext uri="{FF2B5EF4-FFF2-40B4-BE49-F238E27FC236}">
-                <a16:creationId xmlns:a16="http://schemas.microsoft.com/office/drawing/2014/main" id="{514C8EFF-A38F-4680-A470-7F8F62BC7751}"/>
+                <a16:creationId xmlns:a16="http://schemas.microsoft.com/office/drawing/2014/main" id="{1CE6E180-02B8-4C53-BEE1-1B085C28752D}"/>
               </a:ext>
             </a:extLst>
           </p:cNvPr>
@@ -3622,7 +3622,7 @@
           <p:cNvPr id="3" name="Picture Placeholder 2">
             <a:extLst xmlns:a="http://schemas.openxmlformats.org/drawingml/2006/main">
               <a:ext uri="{FF2B5EF4-FFF2-40B4-BE49-F238E27FC236}">
-                <a16:creationId xmlns:a16="http://schemas.microsoft.com/office/drawing/2014/main" id="{4B7AF57F-629E-4EE0-80D7-647249DDEEE5}"/>
+                <a16:creationId xmlns:a16="http://schemas.microsoft.com/office/drawing/2014/main" id="{E4AB1E61-2999-4A48-81C9-18B6B7D067E3}"/>
               </a:ext>
             </a:extLst>
           </p:cNvPr>
@@ -3697,7 +3697,7 @@
           <p:cNvPr id="4" name="Text Placeholder 3">
             <a:extLst xmlns:a="http://schemas.openxmlformats.org/drawingml/2006/main">
               <a:ext uri="{FF2B5EF4-FFF2-40B4-BE49-F238E27FC236}">
-                <a16:creationId xmlns:a16="http://schemas.microsoft.com/office/drawing/2014/main" id="{AA135958-04D8-47EA-AA8F-4A58FBF79489}"/>
+                <a16:creationId xmlns:a16="http://schemas.microsoft.com/office/drawing/2014/main" id="{6AB6E4D8-96DB-40A5-8E22-3E124720EC41}"/>
               </a:ext>
             </a:extLst>
           </p:cNvPr>
@@ -3778,7 +3778,7 @@
           <p:cNvPr id="8" name="Date Placeholder 7">
             <a:extLst xmlns:a="http://schemas.openxmlformats.org/drawingml/2006/main">
               <a:ext uri="{FF2B5EF4-FFF2-40B4-BE49-F238E27FC236}">
-                <a16:creationId xmlns:a16="http://schemas.microsoft.com/office/drawing/2014/main" id="{24993D6B-F833-4C36-8B71-0304324E6A78}"/>
+                <a16:creationId xmlns:a16="http://schemas.microsoft.com/office/drawing/2014/main" id="{4D5690D5-57CB-465F-AFAB-95C403419EB0}"/>
               </a:ext>
             </a:extLst>
           </p:cNvPr>
@@ -3806,7 +3806,7 @@
           <p:cNvPr id="9" name="Footer Placeholder 8">
             <a:extLst xmlns:a="http://schemas.openxmlformats.org/drawingml/2006/main">
               <a:ext uri="{FF2B5EF4-FFF2-40B4-BE49-F238E27FC236}">
-                <a16:creationId xmlns:a16="http://schemas.microsoft.com/office/drawing/2014/main" id="{D5ADC0BE-A3D0-4DFF-B59D-0D74629B2BBB}"/>
+                <a16:creationId xmlns:a16="http://schemas.microsoft.com/office/drawing/2014/main" id="{D4E031D2-569C-4CB9-A111-93CACC460D58}"/>
               </a:ext>
             </a:extLst>
           </p:cNvPr>
@@ -3836,7 +3836,7 @@
           <p:cNvPr id="10" name="Slide Number Placeholder 9">
             <a:extLst xmlns:a="http://schemas.openxmlformats.org/drawingml/2006/main">
               <a:ext uri="{FF2B5EF4-FFF2-40B4-BE49-F238E27FC236}">
-                <a16:creationId xmlns:a16="http://schemas.microsoft.com/office/drawing/2014/main" id="{132A91ED-C2AF-4E63-A098-67011F833081}"/>
+                <a16:creationId xmlns:a16="http://schemas.microsoft.com/office/drawing/2014/main" id="{951007F1-679C-45C6-8C39-B557A7B030E8}"/>
               </a:ext>
             </a:extLst>
           </p:cNvPr>
@@ -3886,7 +3886,7 @@
           <p:cNvPr id="7" name="Rectangle 6">
             <a:extLst xmlns:a="http://schemas.openxmlformats.org/drawingml/2006/main">
               <a:ext uri="{FF2B5EF4-FFF2-40B4-BE49-F238E27FC236}">
-                <a16:creationId xmlns:a16="http://schemas.microsoft.com/office/drawing/2014/main" id="{708FFB93-B44F-4A87-B2B8-6D27116818B4}"/>
+                <a16:creationId xmlns:a16="http://schemas.microsoft.com/office/drawing/2014/main" id="{D88DAA2D-2BEE-4884-AE60-4E8730DB1547}"/>
               </a:ext>
             </a:extLst>
           </p:cNvPr>
@@ -3932,7 +3932,7 @@
           <p:cNvPr id="2" name="Title Placeholder 1">
             <a:extLst xmlns:a="http://schemas.openxmlformats.org/drawingml/2006/main">
               <a:ext uri="{FF2B5EF4-FFF2-40B4-BE49-F238E27FC236}">
-                <a16:creationId xmlns:a16="http://schemas.microsoft.com/office/drawing/2014/main" id="{E5382597-5AA7-4A3C-930A-6D6308D3F3D9}"/>
+                <a16:creationId xmlns:a16="http://schemas.microsoft.com/office/drawing/2014/main" id="{29AA81FD-BD60-4F5F-8D8F-E1F27723D567}"/>
               </a:ext>
             </a:extLst>
           </p:cNvPr>
@@ -3970,7 +3970,7 @@
           <p:cNvPr id="38" name="Rectangle 37">
             <a:extLst xmlns:a="http://schemas.openxmlformats.org/drawingml/2006/main">
               <a:ext uri="{FF2B5EF4-FFF2-40B4-BE49-F238E27FC236}">
-                <a16:creationId xmlns:a16="http://schemas.microsoft.com/office/drawing/2014/main" id="{EB39491A-FC17-4EF9-BE92-53C76CE47917}"/>
+                <a16:creationId xmlns:a16="http://schemas.microsoft.com/office/drawing/2014/main" id="{102D8ACA-47B0-44FB-B82D-D178F2E14EAD}"/>
               </a:ext>
             </a:extLst>
           </p:cNvPr>
@@ -4018,7 +4018,7 @@
           <p:cNvPr id="3" name="Text Placeholder 2">
             <a:extLst xmlns:a="http://schemas.openxmlformats.org/drawingml/2006/main">
               <a:ext uri="{FF2B5EF4-FFF2-40B4-BE49-F238E27FC236}">
-                <a16:creationId xmlns:a16="http://schemas.microsoft.com/office/drawing/2014/main" id="{CAE1BAA7-ED5C-440F-AE48-C009D0DC4819}"/>
+                <a16:creationId xmlns:a16="http://schemas.microsoft.com/office/drawing/2014/main" id="{54A3B836-84FA-4D46-944E-8AC7FB60932C}"/>
               </a:ext>
             </a:extLst>
           </p:cNvPr>
@@ -4091,7 +4091,7 @@
           <p:cNvPr id="4" name="Date Placeholder 3">
             <a:extLst xmlns:a="http://schemas.openxmlformats.org/drawingml/2006/main">
               <a:ext uri="{FF2B5EF4-FFF2-40B4-BE49-F238E27FC236}">
-                <a16:creationId xmlns:a16="http://schemas.microsoft.com/office/drawing/2014/main" id="{709B482A-125D-433F-8E1A-FD9286B2979B}"/>
+                <a16:creationId xmlns:a16="http://schemas.microsoft.com/office/drawing/2014/main" id="{8CAE1C14-B571-49B5-8904-5C93D51F82C1}"/>
               </a:ext>
             </a:extLst>
           </p:cNvPr>
@@ -4139,7 +4139,7 @@
           <p:cNvPr id="5" name="Footer Placeholder 4">
             <a:extLst xmlns:a="http://schemas.openxmlformats.org/drawingml/2006/main">
               <a:ext uri="{FF2B5EF4-FFF2-40B4-BE49-F238E27FC236}">
-                <a16:creationId xmlns:a16="http://schemas.microsoft.com/office/drawing/2014/main" id="{8D924C61-8377-4FD8-9D0E-1D7FE742D900}"/>
+                <a16:creationId xmlns:a16="http://schemas.microsoft.com/office/drawing/2014/main" id="{8544DCFA-0CF9-45C5-856F-AA48488C1A13}"/>
               </a:ext>
             </a:extLst>
           </p:cNvPr>
@@ -4184,7 +4184,7 @@
           <p:cNvPr id="6" name="Slide Number Placeholder 5">
             <a:extLst xmlns:a="http://schemas.openxmlformats.org/drawingml/2006/main">
               <a:ext uri="{FF2B5EF4-FFF2-40B4-BE49-F238E27FC236}">
-                <a16:creationId xmlns:a16="http://schemas.microsoft.com/office/drawing/2014/main" id="{89331619-BABC-4FC9-84D3-DE32D5DDFA13}"/>
+                <a16:creationId xmlns:a16="http://schemas.microsoft.com/office/drawing/2014/main" id="{C2F5A282-346B-421A-91B9-EC65B6CC7373}"/>
               </a:ext>
             </a:extLst>
           </p:cNvPr>
@@ -4228,17 +4228,17 @@
   </p:cSld>
   <p:clrMap bg1="lt1" tx1="dk1" bg2="lt2" tx2="dk2" accent1="accent1" accent2="accent2" accent3="accent3" accent4="accent4" accent5="accent5" accent6="accent6" hlink="hlink" folHlink="folHlink"/>
   <p:sldLayoutIdLst>
-    <p:sldLayoutId xmlns:r="http://schemas.openxmlformats.org/officeDocument/2006/relationships" id="2147483649" r:id="Rf58cda58feab4545"/>
-    <p:sldLayoutId xmlns:r="http://schemas.openxmlformats.org/officeDocument/2006/relationships" id="2147483650" r:id="Rdbdbe17cbcf043c8"/>
-    <p:sldLayoutId xmlns:r="http://schemas.openxmlformats.org/officeDocument/2006/relationships" id="2147483651" r:id="R29022c0d5c2f495c"/>
-    <p:sldLayoutId xmlns:r="http://schemas.openxmlformats.org/officeDocument/2006/relationships" id="2147483652" r:id="Rdbc6760b66084188"/>
-    <p:sldLayoutId xmlns:r="http://schemas.openxmlformats.org/officeDocument/2006/relationships" id="2147483653" r:id="R9750aae1464945b4"/>
-    <p:sldLayoutId xmlns:r="http://schemas.openxmlformats.org/officeDocument/2006/relationships" id="2147483654" r:id="R4d6836f0b5794474"/>
-    <p:sldLayoutId xmlns:r="http://schemas.openxmlformats.org/officeDocument/2006/relationships" id="2147483655" r:id="Re5f5872e9f084339"/>
-    <p:sldLayoutId xmlns:r="http://schemas.openxmlformats.org/officeDocument/2006/relationships" id="2147483656" r:id="R707683b65ddc48fd"/>
-    <p:sldLayoutId xmlns:r="http://schemas.openxmlformats.org/officeDocument/2006/relationships" id="2147483657" r:id="Rad306ef630d64fda"/>
-    <p:sldLayoutId xmlns:r="http://schemas.openxmlformats.org/officeDocument/2006/relationships" id="2147483658" r:id="Ra1eec6e35e9c40db"/>
-    <p:sldLayoutId xmlns:r="http://schemas.openxmlformats.org/officeDocument/2006/relationships" id="2147483659" r:id="R91fc093e057443b0"/>
+    <p:sldLayoutId xmlns:r="http://schemas.openxmlformats.org/officeDocument/2006/relationships" id="2147483649" r:id="Rb2843cf734a24516"/>
+    <p:sldLayoutId xmlns:r="http://schemas.openxmlformats.org/officeDocument/2006/relationships" id="2147483650" r:id="R92b29c8c074a40a9"/>
+    <p:sldLayoutId xmlns:r="http://schemas.openxmlformats.org/officeDocument/2006/relationships" id="2147483651" r:id="Ree8d725958394833"/>
+    <p:sldLayoutId xmlns:r="http://schemas.openxmlformats.org/officeDocument/2006/relationships" id="2147483652" r:id="Raa6bcede410e4b7b"/>
+    <p:sldLayoutId xmlns:r="http://schemas.openxmlformats.org/officeDocument/2006/relationships" id="2147483653" r:id="Ra9b535ef70d841b4"/>
+    <p:sldLayoutId xmlns:r="http://schemas.openxmlformats.org/officeDocument/2006/relationships" id="2147483654" r:id="R236a206aef2440e1"/>
+    <p:sldLayoutId xmlns:r="http://schemas.openxmlformats.org/officeDocument/2006/relationships" id="2147483655" r:id="R85255ebe3eeb454b"/>
+    <p:sldLayoutId xmlns:r="http://schemas.openxmlformats.org/officeDocument/2006/relationships" id="2147483656" r:id="Rbe2f16b74623433a"/>
+    <p:sldLayoutId xmlns:r="http://schemas.openxmlformats.org/officeDocument/2006/relationships" id="2147483657" r:id="Rece47eb6460644a4"/>
+    <p:sldLayoutId xmlns:r="http://schemas.openxmlformats.org/officeDocument/2006/relationships" id="2147483658" r:id="R41ab02ad9efc47de"/>
+    <p:sldLayoutId xmlns:r="http://schemas.openxmlformats.org/officeDocument/2006/relationships" id="2147483659" r:id="R8efad933e02d46ec"/>
   </p:sldLayoutIdLst>
   <p:txStyles>
     <p:titleStyle>
@@ -5408,7 +5408,7 @@
           </a:bodyPr>
           <a:lstStyle xmlns:a="http://schemas.openxmlformats.org/drawingml/2006/main">
             <a:defPPr>
-              <a:defRPr sz="1650">
+              <a:defRPr sz="1575">
                 <a:solidFill>
                   <a:srgbClr val="595959"/>
                 </a:solidFill>
@@ -5424,7 +5424,7 @@
                 <a:spcPts val="1000"/>
               </a:spcAft>
               <a:buChar char="•"/>
-              <a:defRPr sz="1650">
+              <a:defRPr sz="1575">
                 <a:solidFill>
                   <a:srgbClr val="595959"/>
                 </a:solidFill>
@@ -5434,7 +5434,7 @@
               </a:defRPr>
             </a:pPr>
             <a:r>
-              <a:rPr sz="1650">
+              <a:rPr sz="1575">
                 <a:solidFill>
                   <a:srgbClr val="595959"/>
                 </a:solidFill>
@@ -5451,7 +5451,7 @@
                 <a:spcPts val="1000"/>
               </a:spcAft>
               <a:buChar char="•"/>
-              <a:defRPr sz="1650">
+              <a:defRPr sz="1575">
                 <a:solidFill>
                   <a:srgbClr val="595959"/>
                 </a:solidFill>
@@ -5461,7 +5461,7 @@
               </a:defRPr>
             </a:pPr>
             <a:r>
-              <a:rPr sz="1650">
+              <a:rPr sz="1575">
                 <a:solidFill>
                   <a:srgbClr val="595959"/>
                 </a:solidFill>
@@ -5478,7 +5478,7 @@
                 <a:spcPts val="1000"/>
               </a:spcAft>
               <a:buChar char="•"/>
-              <a:defRPr sz="1650">
+              <a:defRPr sz="1575">
                 <a:solidFill>
                   <a:srgbClr val="595959"/>
                 </a:solidFill>
@@ -5488,7 +5488,7 @@
               </a:defRPr>
             </a:pPr>
             <a:r>
-              <a:rPr sz="1650">
+              <a:rPr sz="1575">
                 <a:solidFill>
                   <a:srgbClr val="595959"/>
                 </a:solidFill>
@@ -5505,7 +5505,7 @@
                 <a:spcPts val="1000"/>
               </a:spcAft>
               <a:buChar char="•"/>
-              <a:defRPr sz="1650">
+              <a:defRPr sz="1575">
                 <a:solidFill>
                   <a:srgbClr val="595959"/>
                 </a:solidFill>
@@ -5515,7 +5515,7 @@
               </a:defRPr>
             </a:pPr>
             <a:r>
-              <a:rPr sz="1650">
+              <a:rPr sz="1575">
                 <a:solidFill>
                   <a:srgbClr val="595959"/>
                 </a:solidFill>
@@ -5523,7 +5523,7 @@
                 <a:ea typeface="Corbel"/>
                 <a:cs typeface="Corbel"/>
               </a:rPr>
-              <a:t>A side-by-side review pane lets users verify and edit extracted details beside the source image.</a:t>
+              <a:t>Visual task review lets users edit extracted details while viewing the actual source screenshot inside the app.</a:t>
             </a:r>
           </a:p>
           <a:p xmlns:a="http://schemas.openxmlformats.org/drawingml/2006/main">
@@ -5532,7 +5532,7 @@
                 <a:spcPts val="1000"/>
               </a:spcAft>
               <a:buChar char="•"/>
-              <a:defRPr sz="1650">
+              <a:defRPr sz="1575">
                 <a:solidFill>
                   <a:srgbClr val="595959"/>
                 </a:solidFill>
@@ -5542,7 +5542,34 @@
               </a:defRPr>
             </a:pPr>
             <a:r>
-              <a:rPr sz="1650">
+              <a:rPr sz="1575">
+                <a:solidFill>
+                  <a:srgbClr val="595959"/>
+                </a:solidFill>
+                <a:latin typeface="Corbel"/>
+                <a:ea typeface="Corbel"/>
+                <a:cs typeface="Corbel"/>
+              </a:rPr>
+              <a:t>UI edits sync instantly with the interactive dashboard calendar.</a:t>
+            </a:r>
+          </a:p>
+          <a:p xmlns:a="http://schemas.openxmlformats.org/drawingml/2006/main">
+            <a:pPr marL="304800" indent="-152400">
+              <a:spcAft>
+                <a:spcPts val="1000"/>
+              </a:spcAft>
+              <a:buChar char="•"/>
+              <a:defRPr sz="1575">
+                <a:solidFill>
+                  <a:srgbClr val="595959"/>
+                </a:solidFill>
+                <a:latin typeface="Corbel"/>
+                <a:ea typeface="Corbel"/>
+                <a:cs typeface="Corbel"/>
+              </a:defRPr>
+            </a:pPr>
+            <a:r>
+              <a:rPr sz="1575">
                 <a:solidFill>
                   <a:srgbClr val="595959"/>
                 </a:solidFill>
@@ -5630,7 +5657,7 @@
           </a:bodyPr>
           <a:lstStyle xmlns:a="http://schemas.openxmlformats.org/drawingml/2006/main">
             <a:defPPr>
-              <a:defRPr sz="1613">
+              <a:defRPr sz="1500">
                 <a:solidFill>
                   <a:srgbClr val="595959"/>
                 </a:solidFill>
@@ -5646,7 +5673,7 @@
                 <a:spcPts val="1000"/>
               </a:spcAft>
               <a:buChar char="•"/>
-              <a:defRPr sz="1613">
+              <a:defRPr sz="1500">
                 <a:solidFill>
                   <a:srgbClr val="595959"/>
                 </a:solidFill>
@@ -5656,7 +5683,7 @@
               </a:defRPr>
             </a:pPr>
             <a:r>
-              <a:rPr sz="1613">
+              <a:rPr sz="1500">
                 <a:solidFill>
                   <a:srgbClr val="595959"/>
                 </a:solidFill>
@@ -5664,7 +5691,7 @@
                 <a:ea typeface="Corbel"/>
                 <a:cs typeface="Corbel"/>
               </a:rPr>
-              <a:t>Rust and Axum power the API gateway, routing and JWT authentication.</a:t>
+              <a:t>Rust and Axum power robust API routing and secure JWT authentication.</a:t>
             </a:r>
           </a:p>
           <a:p xmlns:a="http://schemas.openxmlformats.org/drawingml/2006/main">
@@ -5673,7 +5700,7 @@
                 <a:spcPts val="1000"/>
               </a:spcAft>
               <a:buChar char="•"/>
-              <a:defRPr sz="1613">
+              <a:defRPr sz="1500">
                 <a:solidFill>
                   <a:srgbClr val="595959"/>
                 </a:solidFill>
@@ -5683,7 +5710,7 @@
               </a:defRPr>
             </a:pPr>
             <a:r>
-              <a:rPr sz="1613">
+              <a:rPr sz="1500">
                 <a:solidFill>
                   <a:srgbClr val="595959"/>
                 </a:solidFill>
@@ -5691,7 +5718,7 @@
                 <a:ea typeface="Corbel"/>
                 <a:cs typeface="Corbel"/>
               </a:rPr>
-              <a:t>C++ with Crow and SQLite handles task storage and retrieval.</a:t>
+              <a:t>C++ with Crow and SQLite handles task storage, data migration and retrieval.</a:t>
             </a:r>
           </a:p>
           <a:p xmlns:a="http://schemas.openxmlformats.org/drawingml/2006/main">
@@ -5700,7 +5727,7 @@
                 <a:spcPts val="1000"/>
               </a:spcAft>
               <a:buChar char="•"/>
-              <a:defRPr sz="1613">
+              <a:defRPr sz="1500">
                 <a:solidFill>
                   <a:srgbClr val="595959"/>
                 </a:solidFill>
@@ -5710,7 +5737,7 @@
               </a:defRPr>
             </a:pPr>
             <a:r>
-              <a:rPr sz="1613">
+              <a:rPr sz="1500">
                 <a:solidFill>
                   <a:srgbClr val="595959"/>
                 </a:solidFill>
@@ -5727,7 +5754,7 @@
                 <a:spcPts val="1000"/>
               </a:spcAft>
               <a:buChar char="•"/>
-              <a:defRPr sz="1613">
+              <a:defRPr sz="1500">
                 <a:solidFill>
                   <a:srgbClr val="595959"/>
                 </a:solidFill>
@@ -5737,7 +5764,7 @@
               </a:defRPr>
             </a:pPr>
             <a:r>
-              <a:rPr sz="1613">
+              <a:rPr sz="1500">
                 <a:solidFill>
                   <a:srgbClr val="595959"/>
                 </a:solidFill>
@@ -5745,7 +5772,7 @@
                 <a:ea typeface="Corbel"/>
                 <a:cs typeface="Corbel"/>
               </a:rPr>
-              <a:t>Clients include an Electron PC app, a vanilla HTML/CSS/JavaScript web app and Android.</a:t>
+              <a:t>Clients include an Electron PC app with local file watchers and a vanilla HTML/CSS/JavaScript light-mode web app.</a:t>
             </a:r>
           </a:p>
           <a:p xmlns:a="http://schemas.openxmlformats.org/drawingml/2006/main">
@@ -5754,7 +5781,7 @@
                 <a:spcPts val="1000"/>
               </a:spcAft>
               <a:buChar char="•"/>
-              <a:defRPr sz="1613">
+              <a:defRPr sz="1500">
                 <a:solidFill>
                   <a:srgbClr val="595959"/>
                 </a:solidFill>
@@ -5764,7 +5791,7 @@
               </a:defRPr>
             </a:pPr>
             <a:r>
-              <a:rPr sz="1613">
+              <a:rPr sz="1500">
                 <a:solidFill>
                   <a:srgbClr val="595959"/>
                 </a:solidFill>
@@ -5772,7 +5799,7 @@
                 <a:ea typeface="Corbel"/>
                 <a:cs typeface="Corbel"/>
               </a:rPr>
-              <a:t>Docker containers run on an AWS EC2 cloud instance.</a:t>
+              <a:t>Docker containers run on AWS EC2. Precompiled multi-stage images work around cloud hardware build constraints.</a:t>
             </a:r>
           </a:p>
         </p:txBody>
@@ -5945,7 +5972,7 @@
           <p:cNvPr id="2" name="Title 1">
             <a:extLst xmlns:a="http://schemas.openxmlformats.org/drawingml/2006/main">
               <a:ext uri="{FF2B5EF4-FFF2-40B4-BE49-F238E27FC236}">
-                <a16:creationId xmlns:a16="http://schemas.microsoft.com/office/drawing/2014/main" id="{7406F7DE-439D-4B87-90BF-34F2684888F1}"/>
+                <a16:creationId xmlns:a16="http://schemas.microsoft.com/office/drawing/2014/main" id="{1DC34C77-4C15-4833-910E-F711A8921D6D}"/>
               </a:ext>
             </a:extLst>
           </p:cNvPr>
@@ -5973,7 +6000,7 @@
           <p:cNvPr id="3" name="Content Placeholder 2">
             <a:extLst xmlns:a="http://schemas.openxmlformats.org/drawingml/2006/main">
               <a:ext uri="{FF2B5EF4-FFF2-40B4-BE49-F238E27FC236}">
-                <a16:creationId xmlns:a16="http://schemas.microsoft.com/office/drawing/2014/main" id="{14104125-0808-41E2-9B17-852BC1AAF79A}"/>
+                <a16:creationId xmlns:a16="http://schemas.microsoft.com/office/drawing/2014/main" id="{4B9B309C-C2FE-4747-A755-A38C1ADB2F79}"/>
               </a:ext>
             </a:extLst>
           </p:cNvPr>
@@ -6087,7 +6114,7 @@
     </p:spTree>
     <p:extLst>
       <p:ext uri="{BB962C8B-B14F-4D97-AF65-F5344CB8AC3E}">
-        <p14:creationId xmlns:p14="http://schemas.microsoft.com/office/powerpoint/2010/main" val="128143167"/>
+        <p14:creationId xmlns:p14="http://schemas.microsoft.com/office/powerpoint/2010/main" val="1036139865"/>
       </p:ext>
     </p:extLst>
   </p:cSld>
@@ -6111,7 +6138,7 @@
           <p:cNvPr id="2" name="Title 1">
             <a:extLst xmlns:a="http://schemas.openxmlformats.org/drawingml/2006/main">
               <a:ext uri="{FF2B5EF4-FFF2-40B4-BE49-F238E27FC236}">
-                <a16:creationId xmlns:a16="http://schemas.microsoft.com/office/drawing/2014/main" id="{7406F7DE-439D-4B87-90BF-34F2684888F1}"/>
+                <a16:creationId xmlns:a16="http://schemas.microsoft.com/office/drawing/2014/main" id="{1DC34C77-4C15-4833-910E-F711A8921D6D}"/>
               </a:ext>
             </a:extLst>
           </p:cNvPr>
@@ -6139,7 +6166,7 @@
           <p:cNvPr id="3" name="Content Placeholder 2">
             <a:extLst xmlns:a="http://schemas.openxmlformats.org/drawingml/2006/main">
               <a:ext uri="{FF2B5EF4-FFF2-40B4-BE49-F238E27FC236}">
-                <a16:creationId xmlns:a16="http://schemas.microsoft.com/office/drawing/2014/main" id="{14104125-0808-41E2-9B17-852BC1AAF79A}"/>
+                <a16:creationId xmlns:a16="http://schemas.microsoft.com/office/drawing/2014/main" id="{4B9B309C-C2FE-4747-A755-A38C1ADB2F79}"/>
               </a:ext>
             </a:extLst>
           </p:cNvPr>
@@ -6226,7 +6253,7 @@
     </p:spTree>
     <p:extLst>
       <p:ext uri="{BB962C8B-B14F-4D97-AF65-F5344CB8AC3E}">
-        <p14:creationId xmlns:p14="http://schemas.microsoft.com/office/powerpoint/2010/main" val="1966440714"/>
+        <p14:creationId xmlns:p14="http://schemas.microsoft.com/office/powerpoint/2010/main" val="1315462532"/>
       </p:ext>
     </p:extLst>
   </p:cSld>
